--- a/public/fun/pack/pptx/weddingpro/결혼식프리미엄_33_식순중심_와인로즈.pptx
+++ b/public/fun/pack/pptx/weddingpro/결혼식프리미엄_33_식순중심_와인로즈.pptx
@@ -113,12 +113,12 @@
   <p:extLst>
     <p:ext uri="{521415D9-36F7-43E2-AB2F-B90AF26B5E84}">
       <p14:sectionLst xmlns:p14="http://schemas.microsoft.com/office/powerpoint/2010/main">
-        <p14:section name="시작" id="{15AEF684-A1C5-46AD-AFF1-0B7DCC81AD30}">
+        <p14:section name="시작" id="{319C586F-20A1-4B49-8188-7DDC57EE7122}">
           <p14:sldIdLst>
             <p14:sldId id="256"/>
           </p14:sldIdLst>
         </p14:section>
-        <p14:section name="본문" id="{581B2F2B-C0E1-4F5C-B178-0173E59F76EF}">
+        <p14:section name="본문" id="{C05D778F-02B9-4B12-8E71-0A0E209D1DD7}">
           <p14:sldIdLst>
             <p14:sldId id="257"/>
             <p14:sldId id="258"/>
@@ -127,7 +127,7 @@
             <p14:sldId id="261"/>
           </p14:sldIdLst>
         </p14:section>
-        <p14:section name="마무리" id="{B441758F-204A-4A7E-820B-4EC877050F6F}">
+        <p14:section name="마무리" id="{B8E366AE-0751-4511-99EF-0F42FAD9B864}">
           <p14:sldIdLst>
             <p14:sldId id="262"/>
           </p14:sldIdLst>
@@ -1453,7 +1453,7 @@
             </a:lvl1pPr>
           </a:lstStyle>
           <a:p>
-            <a:fld id="{84E3EAC9-6387-42B4-85BF-E3AB191EE204}" type="slidenum">
+            <a:fld id="{E8D1F568-25DB-469D-B944-97D45260BB95}" type="slidenum">
               <a:rPr lang="en-US"/>
               <a:t>‹#›</a:t>
             </a:fld>
@@ -2092,7 +2092,7 @@
             </a:lvl1pPr>
           </a:lstStyle>
           <a:p>
-            <a:fld id="{ED0B6376-DE19-48D6-BE55-546EEFAC0CBD}" type="slidenum">
+            <a:fld id="{59797E3F-BD55-4753-8704-6DCA996A55F9}" type="slidenum">
               <a:rPr lang="en-US"/>
               <a:t>‹#›</a:t>
             </a:fld>
@@ -2780,7 +2780,7 @@
             </a:lvl1pPr>
           </a:lstStyle>
           <a:p>
-            <a:fld id="{47A4B0B6-1ED4-433D-BA42-6EF0B9FB94DD}" type="slidenum">
+            <a:fld id="{F874088E-0DED-42EE-8674-77B8ED7A5F4F}" type="slidenum">
               <a:rPr lang="en-US"/>
               <a:t>‹#›</a:t>
             </a:fld>
@@ -3697,7 +3697,7 @@
           <a:p>
             <a:r>
               <a:rPr lang="ko-KR"/>
-              <a:t>0000. 00. 00 · 예식장 이름</a:t>
+              <a:t>날짜 입력 · 예식장 이름</a:t>
             </a:r>
           </a:p>
         </p:txBody>
@@ -3920,7 +3920,7 @@
           <a:bodyPr/>
           <a:lstStyle/>
           <a:p>
-            <a:fld id="{436BD2CD-AE15-4557-8110-3FEC6ED26A21}" type="slidenum">
+            <a:fld id="{223F55A2-2A2F-40C7-A1B5-71BBD1CD962B}" type="slidenum">
               <a:rPr lang="en-US"/>
               <a:t>‹#›</a:t>
             </a:fld>
@@ -4372,7 +4372,7 @@
           <a:bodyPr/>
           <a:lstStyle/>
           <a:p>
-            <a:fld id="{95D606D9-EB52-412A-AF00-516AE57818AE}" type="slidenum">
+            <a:fld id="{8487B616-3BD0-461C-9F27-41B141554C09}" type="slidenum">
               <a:rPr lang="en-US"/>
               <a:t>‹#›</a:t>
             </a:fld>
@@ -5201,7 +5201,7 @@
           <a:bodyPr/>
           <a:lstStyle/>
           <a:p>
-            <a:fld id="{DC53D5D4-761A-40BE-A913-B555B51906D3}" type="slidenum">
+            <a:fld id="{997E44DC-A9FB-4042-9D71-3443CEFEFD9C}" type="slidenum">
               <a:rPr lang="en-US"/>
               <a:t>‹#›</a:t>
             </a:fld>
@@ -6561,7 +6561,7 @@
           <a:bodyPr/>
           <a:lstStyle/>
           <a:p>
-            <a:fld id="{B6E31A6F-CEE9-4696-A218-A13BBB9492D2}" type="slidenum">
+            <a:fld id="{4ADB790C-87F0-44AA-9AF5-670DFB302C88}" type="slidenum">
               <a:rPr lang="en-US"/>
               <a:t>‹#›</a:t>
             </a:fld>
@@ -6649,7 +6649,7 @@
           <a:bodyPr/>
           <a:lstStyle/>
           <a:p>
-            <a:fld id="{2A1A388C-C871-44DB-84A6-EED6E66F2B07}" type="slidenum">
+            <a:fld id="{21A1A5F8-DB6F-450E-8855-AE89DA50E3FF}" type="slidenum">
               <a:rPr lang="en-US"/>
               <a:t>‹#›</a:t>
             </a:fld>
